--- a/assets/pptx/catalog-490.pptx
+++ b/assets/pptx/catalog-490.pptx
@@ -3304,7 +3304,7 @@
                 <a:ea typeface="Ebrima"/>
                 <a:cs typeface="Ebrima"/>
               </a:rPr>
-              <a:t>ኦ ነጻ ነሽ አላት (2x)</a:t>
+              <a:t>ኦ ነጻ ነሽ አላት 2x</a:t>
             </a:r>
           </a:p>
         </p:txBody>
@@ -3528,7 +3528,7 @@
                 <a:ea typeface="Ebrima"/>
                 <a:cs typeface="Ebrima"/>
               </a:rPr>
-              <a:t>ለካ አምላኬ ከሞት በላይ ነው (2x)</a:t>
+              <a:t>ለካ አምላኬ ከሞት በላይ ነው 2x</a:t>
             </a:r>
           </a:p>
         </p:txBody>
@@ -3631,7 +3631,7 @@
                 <a:ea typeface="Ebrima"/>
                 <a:cs typeface="Ebrima"/>
               </a:rPr>
-              <a:t>ይኸው ቆሞ ይሄዳል ሞተ የተባለው (4x)</a:t>
+              <a:t>ይኸው ቆሞ ይሄዳል ሞተ የተባለው 4x</a:t>
             </a:r>
           </a:p>
         </p:txBody>
@@ -3752,7 +3752,7 @@
                 <a:ea typeface="Ebrima"/>
                 <a:cs typeface="Ebrima"/>
               </a:rPr>
-              <a:t>ማን ከሰረ ማን ከሰረ (2x)</a:t>
+              <a:t>ማን ከሰረ ማን ከሰረ 2x</a:t>
             </a:r>
           </a:p>
         </p:txBody>
@@ -3855,7 +3855,7 @@
                 <a:ea typeface="Ebrima"/>
                 <a:cs typeface="Ebrima"/>
               </a:rPr>
-              <a:t>ለካ አምላኬ ከሞት በላይ ነው (2x)</a:t>
+              <a:t>ለካ አምላኬ ከሞት በላይ ነው 2x</a:t>
             </a:r>
           </a:p>
         </p:txBody>
@@ -3958,7 +3958,7 @@
                 <a:ea typeface="Ebrima"/>
                 <a:cs typeface="Ebrima"/>
               </a:rPr>
-              <a:t>ይኸው ቆሞ ይሄዳል ሞተ የተባለው (2x)</a:t>
+              <a:t>ይኸው ቆሞ ይሄዳል ሞተ የተባለው 2x</a:t>
             </a:r>
           </a:p>
         </p:txBody>
@@ -4079,7 +4079,7 @@
                 <a:ea typeface="Ebrima"/>
                 <a:cs typeface="Ebrima"/>
               </a:rPr>
-              <a:t>ማን ከሰረ ማን ከሰረ (2x)</a:t>
+              <a:t>ማን ከሰረ ማን ከሰረ 2x</a:t>
             </a:r>
           </a:p>
         </p:txBody>
@@ -4200,7 +4200,7 @@
                 <a:ea typeface="Ebrima"/>
                 <a:cs typeface="Ebrima"/>
               </a:rPr>
-              <a:t>ኦ ነጻ ነሽ አላት (2x)</a:t>
+              <a:t>ኦ ነጻ ነሽ አላት 2x</a:t>
             </a:r>
           </a:p>
         </p:txBody>
@@ -4321,7 +4321,7 @@
                 <a:ea typeface="Ebrima"/>
                 <a:cs typeface="Ebrima"/>
               </a:rPr>
-              <a:t>ሠማያዊ አድርጐታል (2x)</a:t>
+              <a:t>ሠማያዊ አድርጐታል 2x</a:t>
             </a:r>
           </a:p>
         </p:txBody>
